--- a/decks/hist-whitechapel/hist-whitechapel_ch6_the-press.pptx
+++ b/decks/hist-whitechapel/hist-whitechapel_ch6_the-press.pptx
@@ -128,31 +128,31 @@
   <p:extLst>
     <p:ext uri="{521415D9-36F7-43E2-AB2F-B90AF26B5E84}">
       <p14:sectionLst xmlns:p14="http://schemas.microsoft.com/office/powerpoint/2010/main">
-        <p14:section name="Opening" id="{072186fa-e25f-c3c7-7659-300660d66076}">
+        <p14:section name="Opening" id="{1880717e-8f2a-4539-f4c2-b2dca7d17f26}">
           <p14:sldIdLst>
             <p14:sldId id="256"/>
           </p14:sldIdLst>
         </p14:section>
-        <p14:section name="Gate" id="{2b74e949-d3c9-0342-634a-09132162fdc5}">
+        <p14:section name="Gate" id="{d95eea59-cffa-c968-06c6-d0d91acc57c8}">
           <p14:sldIdLst>
             <p14:sldId id="257"/>
             <p14:sldId id="258"/>
             <p14:sldId id="259"/>
           </p14:sldIdLst>
         </p14:section>
-        <p14:section name="Pre-teach" id="{bf2ebb61-4340-acbd-1286-25e04a3377ec}">
+        <p14:section name="Pre-teach" id="{c5d895bd-a6cd-ae12-282f-3af7bb73b7d0}">
           <p14:sldIdLst>
             <p14:sldId id="260"/>
             <p14:sldId id="261"/>
           </p14:sldIdLst>
         </p14:section>
-        <p14:section name="Read-along" id="{94ac6c8a-ae1e-a1f1-cc6e-96c0949f05e0}">
+        <p14:section name="Read-along" id="{815fde9f-4113-5fec-27f3-7296edb3f5ef}">
           <p14:sldIdLst>
             <p14:sldId id="262"/>
             <p14:sldId id="263"/>
           </p14:sldIdLst>
         </p14:section>
-        <p14:section name="Teach" id="{378affe9-c9e8-ace2-bda4-a567fa9ea4a0}">
+        <p14:section name="Teach" id="{cebd9ff7-423a-5b95-3643-92b2e571e7a3}">
           <p14:sldIdLst>
             <p14:sldId id="264"/>
             <p14:sldId id="265"/>
@@ -162,7 +162,7 @@
             <p14:sldId id="269"/>
           </p14:sldIdLst>
         </p14:section>
-        <p14:section name="Routes" id="{3bdf672b-a8b9-b615-bb59-c235138b0fc2}">
+        <p14:section name="Routes" id="{afdb7c35-d6ad-ee03-bb44-292a472b51e6}">
           <p14:sldIdLst>
             <p14:sldId id="270"/>
             <p14:sldId id="271"/>
@@ -170,12 +170,12 @@
             <p14:sldId id="273"/>
           </p14:sldIdLst>
         </p14:section>
-        <p14:section name="Close" id="{7cfd4f9e-cf88-1a68-b42c-c472d2f4b814}">
+        <p14:section name="Close" id="{2281a4ed-e93e-8ceb-3444-f604cceb6c2d}">
           <p14:sldIdLst>
             <p14:sldId id="274"/>
           </p14:sldIdLst>
         </p14:section>
-        <p14:section name="Answers" id="{22385795-5f13-04e0-af04-1224bbaa17b1}">
+        <p14:section name="Answers" id="{d13130e2-bad7-c152-c4d0-c81e3db1155d}">
           <p14:sldIdLst>
             <p14:sldId id="275"/>
             <p14:sldId id="276"/>
